--- a/Kushagra Singh 2427030043 PBL-2 PPT.pptx
+++ b/Kushagra Singh 2427030043 PBL-2 PPT.pptx
@@ -5,7 +5,7 @@
     <p:sldMasterId id="2147483648" r:id="rId1"/>
   </p:sldMasterIdLst>
   <p:notesMasterIdLst>
-    <p:notesMasterId r:id="rId20"/>
+    <p:notesMasterId r:id="rId21"/>
   </p:notesMasterIdLst>
   <p:sldIdLst>
     <p:sldId id="256" r:id="rId2"/>
@@ -24,8 +24,9 @@
     <p:sldId id="266" r:id="rId15"/>
     <p:sldId id="274" r:id="rId16"/>
     <p:sldId id="267" r:id="rId17"/>
-    <p:sldId id="263" r:id="rId18"/>
-    <p:sldId id="264" r:id="rId19"/>
+    <p:sldId id="275" r:id="rId18"/>
+    <p:sldId id="263" r:id="rId19"/>
+    <p:sldId id="264" r:id="rId20"/>
   </p:sldIdLst>
   <p:sldSz cx="12192000" cy="6858000"/>
   <p:notesSz cx="6858000" cy="9144000"/>
@@ -135,7 +136,7 @@
 <file path=ppt/revisionInfo.xml><?xml version="1.0" encoding="utf-8"?>
 <p1510:revInfo xmlns:a="http://schemas.openxmlformats.org/drawingml/2006/main" xmlns:r="http://schemas.openxmlformats.org/officeDocument/2006/relationships" xmlns:p1510="http://schemas.microsoft.com/office/powerpoint/2015/10/main">
   <p1510:revLst>
-    <p1510:client id="{62118EC8-7C6A-45E0-A80B-927C63154ED9}" v="103" dt="2026-02-18T08:37:57.688"/>
+    <p1510:client id="{7834E9DA-A566-4013-88EC-0AA07172C32F}" v="10" dt="2026-04-10T13:23:34.688"/>
   </p1510:revLst>
 </p1510:revInfo>
 </file>
@@ -145,119 +146,18 @@
   <pc:docChgLst>
     <pc:chgData name="Kushagra Singh" userId="d544485b39300f66" providerId="LiveId" clId="{E14CB0D5-A710-4E49-AABE-D5223A212189}"/>
     <pc:docChg chg="undo custSel addSld modSld">
-      <pc:chgData name="Kushagra Singh" userId="d544485b39300f66" providerId="LiveId" clId="{E14CB0D5-A710-4E49-AABE-D5223A212189}" dt="2026-02-19T07:15:47.081" v="2617" actId="14100"/>
+      <pc:chgData name="Kushagra Singh" userId="d544485b39300f66" providerId="LiveId" clId="{E14CB0D5-A710-4E49-AABE-D5223A212189}" dt="2026-04-10T13:23:41.169" v="3721" actId="2711"/>
       <pc:docMkLst>
         <pc:docMk/>
       </pc:docMkLst>
       <pc:sldChg chg="modSp mod">
-        <pc:chgData name="Kushagra Singh" userId="d544485b39300f66" providerId="LiveId" clId="{E14CB0D5-A710-4E49-AABE-D5223A212189}" dt="2026-02-14T16:44:43.779" v="1682" actId="20577"/>
-        <pc:sldMkLst>
-          <pc:docMk/>
-          <pc:sldMk cId="380237416" sldId="256"/>
-        </pc:sldMkLst>
-        <pc:spChg chg="mod">
-          <ac:chgData name="Kushagra Singh" userId="d544485b39300f66" providerId="LiveId" clId="{E14CB0D5-A710-4E49-AABE-D5223A212189}" dt="2026-02-14T16:44:43.779" v="1682" actId="20577"/>
-          <ac:spMkLst>
-            <pc:docMk/>
-            <pc:sldMk cId="380237416" sldId="256"/>
-            <ac:spMk id="2" creationId="{874FB14B-13FD-63D0-B558-FA2B9FA1B8F9}"/>
-          </ac:spMkLst>
-        </pc:spChg>
-        <pc:spChg chg="mod">
-          <ac:chgData name="Kushagra Singh" userId="d544485b39300f66" providerId="LiveId" clId="{E14CB0D5-A710-4E49-AABE-D5223A212189}" dt="2026-02-12T19:35:46.074" v="137" actId="20577"/>
-          <ac:spMkLst>
-            <pc:docMk/>
-            <pc:sldMk cId="380237416" sldId="256"/>
-            <ac:spMk id="3" creationId="{33DAA6DE-3B6C-1A2F-6135-52EEA7D16507}"/>
-          </ac:spMkLst>
-        </pc:spChg>
-        <pc:spChg chg="mod">
-          <ac:chgData name="Kushagra Singh" userId="d544485b39300f66" providerId="LiveId" clId="{E14CB0D5-A710-4E49-AABE-D5223A212189}" dt="2026-02-12T19:35:59.358" v="168" actId="20577"/>
-          <ac:spMkLst>
-            <pc:docMk/>
-            <pc:sldMk cId="380237416" sldId="256"/>
-            <ac:spMk id="4" creationId="{8265C3A1-7DE8-FF2B-D7D7-6CB2859C63C2}"/>
-          </ac:spMkLst>
-        </pc:spChg>
-      </pc:sldChg>
-      <pc:sldChg chg="modSp mod">
-        <pc:chgData name="Kushagra Singh" userId="d544485b39300f66" providerId="LiveId" clId="{E14CB0D5-A710-4E49-AABE-D5223A212189}" dt="2026-02-14T16:44:22.277" v="1680" actId="2711"/>
-        <pc:sldMkLst>
-          <pc:docMk/>
-          <pc:sldMk cId="2878976597" sldId="258"/>
-        </pc:sldMkLst>
-        <pc:spChg chg="mod">
-          <ac:chgData name="Kushagra Singh" userId="d544485b39300f66" providerId="LiveId" clId="{E14CB0D5-A710-4E49-AABE-D5223A212189}" dt="2026-02-14T16:44:17.064" v="1679" actId="2711"/>
-          <ac:spMkLst>
-            <pc:docMk/>
-            <pc:sldMk cId="2878976597" sldId="258"/>
-            <ac:spMk id="2" creationId="{6F25A96B-B72E-0C72-F61B-C99183D10D26}"/>
-          </ac:spMkLst>
-        </pc:spChg>
-        <pc:spChg chg="mod">
-          <ac:chgData name="Kushagra Singh" userId="d544485b39300f66" providerId="LiveId" clId="{E14CB0D5-A710-4E49-AABE-D5223A212189}" dt="2026-02-14T16:44:22.277" v="1680" actId="2711"/>
-          <ac:spMkLst>
-            <pc:docMk/>
-            <pc:sldMk cId="2878976597" sldId="258"/>
-            <ac:spMk id="3" creationId="{E031CBD1-1236-BD10-F9B4-E2675BA38ED1}"/>
-          </ac:spMkLst>
-        </pc:spChg>
-      </pc:sldChg>
-      <pc:sldChg chg="addSp delSp modSp mod">
-        <pc:chgData name="Kushagra Singh" userId="d544485b39300f66" providerId="LiveId" clId="{E14CB0D5-A710-4E49-AABE-D5223A212189}" dt="2026-02-18T08:39:15.178" v="2521" actId="2711"/>
-        <pc:sldMkLst>
-          <pc:docMk/>
-          <pc:sldMk cId="310308161" sldId="259"/>
-        </pc:sldMkLst>
-        <pc:spChg chg="mod">
-          <ac:chgData name="Kushagra Singh" userId="d544485b39300f66" providerId="LiveId" clId="{E14CB0D5-A710-4E49-AABE-D5223A212189}" dt="2026-02-18T08:25:20.440" v="2409" actId="20577"/>
-          <ac:spMkLst>
-            <pc:docMk/>
-            <pc:sldMk cId="310308161" sldId="259"/>
-            <ac:spMk id="2" creationId="{EA85647D-9B85-4135-FDC8-4412998CA206}"/>
-          </ac:spMkLst>
-        </pc:spChg>
-        <pc:spChg chg="mod">
-          <ac:chgData name="Kushagra Singh" userId="d544485b39300f66" providerId="LiveId" clId="{E14CB0D5-A710-4E49-AABE-D5223A212189}" dt="2026-02-18T08:24:48.196" v="2404" actId="20577"/>
-          <ac:spMkLst>
-            <pc:docMk/>
-            <pc:sldMk cId="310308161" sldId="259"/>
-            <ac:spMk id="3" creationId="{7485F665-7E3B-0A75-0EE5-8FA0D35D261D}"/>
-          </ac:spMkLst>
-        </pc:spChg>
-        <pc:graphicFrameChg chg="add del">
-          <ac:chgData name="Kushagra Singh" userId="d544485b39300f66" providerId="LiveId" clId="{E14CB0D5-A710-4E49-AABE-D5223A212189}" dt="2026-02-18T08:20:38.612" v="2364" actId="3680"/>
-          <ac:graphicFrameMkLst>
-            <pc:docMk/>
-            <pc:sldMk cId="310308161" sldId="259"/>
-            <ac:graphicFrameMk id="4" creationId="{3552C1CB-45C5-6CF6-9BFA-629633C5B63A}"/>
-          </ac:graphicFrameMkLst>
-        </pc:graphicFrameChg>
-        <pc:graphicFrameChg chg="add mod modGraphic">
-          <ac:chgData name="Kushagra Singh" userId="d544485b39300f66" providerId="LiveId" clId="{E14CB0D5-A710-4E49-AABE-D5223A212189}" dt="2026-02-18T08:39:15.178" v="2521" actId="2711"/>
-          <ac:graphicFrameMkLst>
-            <pc:docMk/>
-            <pc:sldMk cId="310308161" sldId="259"/>
-            <ac:graphicFrameMk id="5" creationId="{E69EC435-FEE9-13DE-06DC-6C0D8867AC10}"/>
-          </ac:graphicFrameMkLst>
-        </pc:graphicFrameChg>
-      </pc:sldChg>
-      <pc:sldChg chg="modSp mod">
-        <pc:chgData name="Kushagra Singh" userId="d544485b39300f66" providerId="LiveId" clId="{E14CB0D5-A710-4E49-AABE-D5223A212189}" dt="2026-02-14T19:06:34.943" v="2351" actId="20577"/>
+        <pc:chgData name="Kushagra Singh" userId="d544485b39300f66" providerId="LiveId" clId="{E14CB0D5-A710-4E49-AABE-D5223A212189}" dt="2026-04-10T12:23:34.797" v="2641" actId="2711"/>
         <pc:sldMkLst>
           <pc:docMk/>
           <pc:sldMk cId="2374707807" sldId="260"/>
         </pc:sldMkLst>
         <pc:spChg chg="mod">
-          <ac:chgData name="Kushagra Singh" userId="d544485b39300f66" providerId="LiveId" clId="{E14CB0D5-A710-4E49-AABE-D5223A212189}" dt="2026-02-14T16:45:15.419" v="1685" actId="2711"/>
-          <ac:spMkLst>
-            <pc:docMk/>
-            <pc:sldMk cId="2374707807" sldId="260"/>
-            <ac:spMk id="2" creationId="{C5EA1533-4BE1-DF5E-D485-BD167C2BD85D}"/>
-          </ac:spMkLst>
-        </pc:spChg>
-        <pc:spChg chg="mod">
-          <ac:chgData name="Kushagra Singh" userId="d544485b39300f66" providerId="LiveId" clId="{E14CB0D5-A710-4E49-AABE-D5223A212189}" dt="2026-02-14T19:06:34.943" v="2351" actId="20577"/>
+          <ac:chgData name="Kushagra Singh" userId="d544485b39300f66" providerId="LiveId" clId="{E14CB0D5-A710-4E49-AABE-D5223A212189}" dt="2026-04-10T12:23:34.797" v="2641" actId="2711"/>
           <ac:spMkLst>
             <pc:docMk/>
             <pc:sldMk cId="2374707807" sldId="260"/>
@@ -266,75 +166,36 @@
         </pc:spChg>
       </pc:sldChg>
       <pc:sldChg chg="addSp delSp modSp mod">
-        <pc:chgData name="Kushagra Singh" userId="d544485b39300f66" providerId="LiveId" clId="{E14CB0D5-A710-4E49-AABE-D5223A212189}" dt="2026-02-14T18:59:39.051" v="2279" actId="20577"/>
-        <pc:sldMkLst>
-          <pc:docMk/>
-          <pc:sldMk cId="1077724860" sldId="261"/>
-        </pc:sldMkLst>
-        <pc:spChg chg="mod">
-          <ac:chgData name="Kushagra Singh" userId="d544485b39300f66" providerId="LiveId" clId="{E14CB0D5-A710-4E49-AABE-D5223A212189}" dt="2026-02-14T16:32:40.373" v="1665" actId="2711"/>
-          <ac:spMkLst>
-            <pc:docMk/>
-            <pc:sldMk cId="1077724860" sldId="261"/>
-            <ac:spMk id="2" creationId="{EAC2C796-D371-7EE6-056A-4956DC25840D}"/>
-          </ac:spMkLst>
-        </pc:spChg>
-        <pc:spChg chg="mod">
-          <ac:chgData name="Kushagra Singh" userId="d544485b39300f66" providerId="LiveId" clId="{E14CB0D5-A710-4E49-AABE-D5223A212189}" dt="2026-02-14T18:59:39.051" v="2279" actId="20577"/>
-          <ac:spMkLst>
-            <pc:docMk/>
-            <pc:sldMk cId="1077724860" sldId="261"/>
-            <ac:spMk id="3" creationId="{F7E7EF98-E6AD-70D5-2BE9-3A859F15DFF4}"/>
-          </ac:spMkLst>
-        </pc:spChg>
-      </pc:sldChg>
-      <pc:sldChg chg="modSp mod">
-        <pc:chgData name="Kushagra Singh" userId="d544485b39300f66" providerId="LiveId" clId="{E14CB0D5-A710-4E49-AABE-D5223A212189}" dt="2026-02-14T16:33:04.268" v="1668" actId="2711"/>
+        <pc:chgData name="Kushagra Singh" userId="d544485b39300f66" providerId="LiveId" clId="{E14CB0D5-A710-4E49-AABE-D5223A212189}" dt="2026-04-10T12:27:39.099" v="3078" actId="20577"/>
         <pc:sldMkLst>
           <pc:docMk/>
           <pc:sldMk cId="3547097812" sldId="262"/>
         </pc:sldMkLst>
         <pc:spChg chg="mod">
-          <ac:chgData name="Kushagra Singh" userId="d544485b39300f66" providerId="LiveId" clId="{E14CB0D5-A710-4E49-AABE-D5223A212189}" dt="2026-02-14T16:32:58.100" v="1667" actId="2711"/>
-          <ac:spMkLst>
-            <pc:docMk/>
-            <pc:sldMk cId="3547097812" sldId="262"/>
-            <ac:spMk id="2" creationId="{DAC66CBD-FC59-BE59-2070-B5315E2C8921}"/>
-          </ac:spMkLst>
-        </pc:spChg>
-        <pc:spChg chg="mod">
-          <ac:chgData name="Kushagra Singh" userId="d544485b39300f66" providerId="LiveId" clId="{E14CB0D5-A710-4E49-AABE-D5223A212189}" dt="2026-02-14T16:33:04.268" v="1668" actId="2711"/>
+          <ac:chgData name="Kushagra Singh" userId="d544485b39300f66" providerId="LiveId" clId="{E14CB0D5-A710-4E49-AABE-D5223A212189}" dt="2026-04-10T12:27:39.099" v="3078" actId="20577"/>
           <ac:spMkLst>
             <pc:docMk/>
             <pc:sldMk cId="3547097812" sldId="262"/>
             <ac:spMk id="3" creationId="{CE3E25AA-71BA-D0F6-3993-32491BD06DD7}"/>
           </ac:spMkLst>
         </pc:spChg>
+        <pc:spChg chg="add del mod">
+          <ac:chgData name="Kushagra Singh" userId="d544485b39300f66" providerId="LiveId" clId="{E14CB0D5-A710-4E49-AABE-D5223A212189}" dt="2026-04-10T12:25:28.340" v="2870" actId="21"/>
+          <ac:spMkLst>
+            <pc:docMk/>
+            <pc:sldMk cId="3547097812" sldId="262"/>
+            <ac:spMk id="4" creationId="{6F943BD0-B1C1-0A6D-539A-96FA37019256}"/>
+          </ac:spMkLst>
+        </pc:spChg>
       </pc:sldChg>
-      <pc:sldChg chg="addSp delSp modSp mod">
-        <pc:chgData name="Kushagra Singh" userId="d544485b39300f66" providerId="LiveId" clId="{E14CB0D5-A710-4E49-AABE-D5223A212189}" dt="2026-02-18T08:40:09.557" v="2534" actId="20577"/>
+      <pc:sldChg chg="modSp mod">
+        <pc:chgData name="Kushagra Singh" userId="d544485b39300f66" providerId="LiveId" clId="{E14CB0D5-A710-4E49-AABE-D5223A212189}" dt="2026-04-10T13:23:41.169" v="3721" actId="2711"/>
         <pc:sldMkLst>
           <pc:docMk/>
           <pc:sldMk cId="2724917500" sldId="263"/>
         </pc:sldMkLst>
         <pc:spChg chg="mod">
-          <ac:chgData name="Kushagra Singh" userId="d544485b39300f66" providerId="LiveId" clId="{E14CB0D5-A710-4E49-AABE-D5223A212189}" dt="2026-02-14T16:47:10.942" v="1693" actId="2711"/>
-          <ac:spMkLst>
-            <pc:docMk/>
-            <pc:sldMk cId="2724917500" sldId="263"/>
-            <ac:spMk id="2" creationId="{5C6C5325-4A51-AE05-7BE6-440D74D0BCB6}"/>
-          </ac:spMkLst>
-        </pc:spChg>
-        <pc:spChg chg="add mod">
-          <ac:chgData name="Kushagra Singh" userId="d544485b39300f66" providerId="LiveId" clId="{E14CB0D5-A710-4E49-AABE-D5223A212189}" dt="2026-02-14T16:28:05.722" v="1393" actId="5793"/>
-          <ac:spMkLst>
-            <pc:docMk/>
-            <pc:sldMk cId="2724917500" sldId="263"/>
-            <ac:spMk id="4" creationId="{6AF71E8F-D5DC-9E47-8444-497758920085}"/>
-          </ac:spMkLst>
-        </pc:spChg>
-        <pc:spChg chg="add mod">
-          <ac:chgData name="Kushagra Singh" userId="d544485b39300f66" providerId="LiveId" clId="{E14CB0D5-A710-4E49-AABE-D5223A212189}" dt="2026-02-18T08:40:09.557" v="2534" actId="20577"/>
+          <ac:chgData name="Kushagra Singh" userId="d544485b39300f66" providerId="LiveId" clId="{E14CB0D5-A710-4E49-AABE-D5223A212189}" dt="2026-04-10T13:23:41.169" v="3721" actId="2711"/>
           <ac:spMkLst>
             <pc:docMk/>
             <pc:sldMk cId="2724917500" sldId="263"/>
@@ -342,76 +203,77 @@
           </ac:spMkLst>
         </pc:spChg>
       </pc:sldChg>
-      <pc:sldChg chg="modSp mod">
-        <pc:chgData name="Kushagra Singh" userId="d544485b39300f66" providerId="LiveId" clId="{E14CB0D5-A710-4E49-AABE-D5223A212189}" dt="2026-02-14T16:47:16.981" v="1694" actId="2711"/>
-        <pc:sldMkLst>
-          <pc:docMk/>
-          <pc:sldMk cId="2374710685" sldId="264"/>
-        </pc:sldMkLst>
-        <pc:spChg chg="mod">
-          <ac:chgData name="Kushagra Singh" userId="d544485b39300f66" providerId="LiveId" clId="{E14CB0D5-A710-4E49-AABE-D5223A212189}" dt="2026-02-14T16:47:16.981" v="1694" actId="2711"/>
-          <ac:spMkLst>
-            <pc:docMk/>
-            <pc:sldMk cId="2374710685" sldId="264"/>
-            <ac:spMk id="4" creationId="{C7208BD6-2A31-5677-2B53-FD39A887D102}"/>
-          </ac:spMkLst>
-        </pc:spChg>
-      </pc:sldChg>
       <pc:sldChg chg="addSp delSp modSp mod">
-        <pc:chgData name="Kushagra Singh" userId="d544485b39300f66" providerId="LiveId" clId="{E14CB0D5-A710-4E49-AABE-D5223A212189}" dt="2026-02-14T19:35:40.523" v="2360" actId="14100"/>
+        <pc:chgData name="Kushagra Singh" userId="d544485b39300f66" providerId="LiveId" clId="{E14CB0D5-A710-4E49-AABE-D5223A212189}" dt="2026-04-10T13:14:31.189" v="3299" actId="1076"/>
         <pc:sldMkLst>
           <pc:docMk/>
           <pc:sldMk cId="3645671189" sldId="266"/>
         </pc:sldMkLst>
-        <pc:spChg chg="mod">
-          <ac:chgData name="Kushagra Singh" userId="d544485b39300f66" providerId="LiveId" clId="{E14CB0D5-A710-4E49-AABE-D5223A212189}" dt="2026-02-14T16:46:01.936" v="1689" actId="2711"/>
+        <pc:spChg chg="add mod">
+          <ac:chgData name="Kushagra Singh" userId="d544485b39300f66" providerId="LiveId" clId="{E14CB0D5-A710-4E49-AABE-D5223A212189}" dt="2026-04-10T12:58:59.709" v="3286" actId="21"/>
           <ac:spMkLst>
             <pc:docMk/>
             <pc:sldMk cId="3645671189" sldId="266"/>
-            <ac:spMk id="2" creationId="{294B33A6-B209-82E0-3AC4-ED0F2117C15F}"/>
+            <ac:spMk id="6" creationId="{EB2789D3-341D-7AD5-B583-8F9DB373EE11}"/>
           </ac:spMkLst>
         </pc:spChg>
-        <pc:picChg chg="add mod">
-          <ac:chgData name="Kushagra Singh" userId="d544485b39300f66" providerId="LiveId" clId="{E14CB0D5-A710-4E49-AABE-D5223A212189}" dt="2026-02-14T19:35:40.523" v="2360" actId="14100"/>
+        <pc:picChg chg="del">
+          <ac:chgData name="Kushagra Singh" userId="d544485b39300f66" providerId="LiveId" clId="{E14CB0D5-A710-4E49-AABE-D5223A212189}" dt="2026-04-10T12:59:14.943" v="3288" actId="21"/>
           <ac:picMkLst>
             <pc:docMk/>
             <pc:sldMk cId="3645671189" sldId="266"/>
             <ac:picMk id="4" creationId="{58552263-B93E-6686-AF1F-94FF4ADD2CCE}"/>
           </ac:picMkLst>
         </pc:picChg>
-        <pc:picChg chg="add mod ord">
-          <ac:chgData name="Kushagra Singh" userId="d544485b39300f66" providerId="LiveId" clId="{E14CB0D5-A710-4E49-AABE-D5223A212189}" dt="2026-02-14T19:07:34.682" v="2354" actId="1076"/>
+        <pc:picChg chg="del">
+          <ac:chgData name="Kushagra Singh" userId="d544485b39300f66" providerId="LiveId" clId="{E14CB0D5-A710-4E49-AABE-D5223A212189}" dt="2026-04-10T12:58:59.709" v="3286" actId="21"/>
           <ac:picMkLst>
             <pc:docMk/>
             <pc:sldMk cId="3645671189" sldId="266"/>
             <ac:picMk id="5" creationId="{40798494-FD85-F359-75EB-D7F79A9FB845}"/>
           </ac:picMkLst>
         </pc:picChg>
-        <pc:picChg chg="add mod">
-          <ac:chgData name="Kushagra Singh" userId="d544485b39300f66" providerId="LiveId" clId="{E14CB0D5-A710-4E49-AABE-D5223A212189}" dt="2026-02-14T19:07:38.145" v="2355" actId="1076"/>
+        <pc:picChg chg="del">
+          <ac:chgData name="Kushagra Singh" userId="d544485b39300f66" providerId="LiveId" clId="{E14CB0D5-A710-4E49-AABE-D5223A212189}" dt="2026-04-10T12:59:04.302" v="3287" actId="21"/>
           <ac:picMkLst>
             <pc:docMk/>
             <pc:sldMk cId="3645671189" sldId="266"/>
             <ac:picMk id="7" creationId="{B9DB7BB6-87DA-231C-9DE3-DF8F54E76E00}"/>
           </ac:picMkLst>
         </pc:picChg>
+        <pc:picChg chg="add mod">
+          <ac:chgData name="Kushagra Singh" userId="d544485b39300f66" providerId="LiveId" clId="{E14CB0D5-A710-4E49-AABE-D5223A212189}" dt="2026-04-10T13:01:37.601" v="3291" actId="1076"/>
+          <ac:picMkLst>
+            <pc:docMk/>
+            <pc:sldMk cId="3645671189" sldId="266"/>
+            <ac:picMk id="9" creationId="{1C708ED2-AF14-A4C5-6FC7-F002F9A8DC72}"/>
+          </ac:picMkLst>
+        </pc:picChg>
+        <pc:picChg chg="add mod">
+          <ac:chgData name="Kushagra Singh" userId="d544485b39300f66" providerId="LiveId" clId="{E14CB0D5-A710-4E49-AABE-D5223A212189}" dt="2026-04-10T13:02:19.434" v="3296" actId="1076"/>
+          <ac:picMkLst>
+            <pc:docMk/>
+            <pc:sldMk cId="3645671189" sldId="266"/>
+            <ac:picMk id="11" creationId="{32A8E0A0-845A-1795-785D-284320F3639C}"/>
+          </ac:picMkLst>
+        </pc:picChg>
+        <pc:picChg chg="add mod">
+          <ac:chgData name="Kushagra Singh" userId="d544485b39300f66" providerId="LiveId" clId="{E14CB0D5-A710-4E49-AABE-D5223A212189}" dt="2026-04-10T13:14:31.189" v="3299" actId="1076"/>
+          <ac:picMkLst>
+            <pc:docMk/>
+            <pc:sldMk cId="3645671189" sldId="266"/>
+            <ac:picMk id="13" creationId="{A4B81988-1DAB-A33D-3D75-A88BC31AB7C8}"/>
+          </ac:picMkLst>
+        </pc:picChg>
       </pc:sldChg>
       <pc:sldChg chg="modSp mod">
-        <pc:chgData name="Kushagra Singh" userId="d544485b39300f66" providerId="LiveId" clId="{E14CB0D5-A710-4E49-AABE-D5223A212189}" dt="2026-02-19T04:47:36.201" v="2613" actId="20577"/>
+        <pc:chgData name="Kushagra Singh" userId="d544485b39300f66" providerId="LiveId" clId="{E14CB0D5-A710-4E49-AABE-D5223A212189}" dt="2026-04-10T13:21:38.039" v="3640" actId="20577"/>
         <pc:sldMkLst>
           <pc:docMk/>
           <pc:sldMk cId="2154956931" sldId="267"/>
         </pc:sldMkLst>
         <pc:spChg chg="mod">
-          <ac:chgData name="Kushagra Singh" userId="d544485b39300f66" providerId="LiveId" clId="{E14CB0D5-A710-4E49-AABE-D5223A212189}" dt="2026-02-19T04:47:36.201" v="2613" actId="20577"/>
-          <ac:spMkLst>
-            <pc:docMk/>
-            <pc:sldMk cId="2154956931" sldId="267"/>
-            <ac:spMk id="2" creationId="{ABB19452-3000-DF4A-F633-2C06CB0E4BBE}"/>
-          </ac:spMkLst>
-        </pc:spChg>
-        <pc:spChg chg="mod">
-          <ac:chgData name="Kushagra Singh" userId="d544485b39300f66" providerId="LiveId" clId="{E14CB0D5-A710-4E49-AABE-D5223A212189}" dt="2026-02-19T04:47:31.667" v="2611" actId="20577"/>
+          <ac:chgData name="Kushagra Singh" userId="d544485b39300f66" providerId="LiveId" clId="{E14CB0D5-A710-4E49-AABE-D5223A212189}" dt="2026-04-10T13:21:38.039" v="3640" actId="20577"/>
           <ac:spMkLst>
             <pc:docMk/>
             <pc:sldMk cId="2154956931" sldId="267"/>
@@ -419,153 +281,22 @@
           </ac:spMkLst>
         </pc:spChg>
       </pc:sldChg>
-      <pc:sldChg chg="modSp new mod">
-        <pc:chgData name="Kushagra Singh" userId="d544485b39300f66" providerId="LiveId" clId="{E14CB0D5-A710-4E49-AABE-D5223A212189}" dt="2026-02-14T16:44:10.253" v="1678" actId="2711"/>
-        <pc:sldMkLst>
-          <pc:docMk/>
-          <pc:sldMk cId="2067999347" sldId="268"/>
-        </pc:sldMkLst>
-        <pc:spChg chg="mod">
-          <ac:chgData name="Kushagra Singh" userId="d544485b39300f66" providerId="LiveId" clId="{E14CB0D5-A710-4E49-AABE-D5223A212189}" dt="2026-02-14T16:44:10.253" v="1678" actId="2711"/>
-          <ac:spMkLst>
-            <pc:docMk/>
-            <pc:sldMk cId="2067999347" sldId="268"/>
-            <ac:spMk id="2" creationId="{51189221-E4FF-DD94-641B-6829CAF6507F}"/>
-          </ac:spMkLst>
-        </pc:spChg>
-        <pc:spChg chg="mod">
-          <ac:chgData name="Kushagra Singh" userId="d544485b39300f66" providerId="LiveId" clId="{E14CB0D5-A710-4E49-AABE-D5223A212189}" dt="2026-02-14T16:44:03.752" v="1677" actId="2711"/>
-          <ac:spMkLst>
-            <pc:docMk/>
-            <pc:sldMk cId="2067999347" sldId="268"/>
-            <ac:spMk id="3" creationId="{E920326A-7963-5670-D289-C0536ABC6365}"/>
-          </ac:spMkLst>
-        </pc:spChg>
-      </pc:sldChg>
-      <pc:sldChg chg="addSp delSp modSp new mod">
-        <pc:chgData name="Kushagra Singh" userId="d544485b39300f66" providerId="LiveId" clId="{E14CB0D5-A710-4E49-AABE-D5223A212189}" dt="2026-02-18T08:38:59.866" v="2520" actId="2711"/>
-        <pc:sldMkLst>
-          <pc:docMk/>
-          <pc:sldMk cId="3584288316" sldId="269"/>
-        </pc:sldMkLst>
-        <pc:spChg chg="mod">
-          <ac:chgData name="Kushagra Singh" userId="d544485b39300f66" providerId="LiveId" clId="{E14CB0D5-A710-4E49-AABE-D5223A212189}" dt="2026-02-18T08:28:57.706" v="2482" actId="20577"/>
-          <ac:spMkLst>
-            <pc:docMk/>
-            <pc:sldMk cId="3584288316" sldId="269"/>
-            <ac:spMk id="2" creationId="{F08A8FFB-AF22-420A-83AF-6D378157C45D}"/>
-          </ac:spMkLst>
-        </pc:spChg>
-        <pc:spChg chg="add del mod">
-          <ac:chgData name="Kushagra Singh" userId="d544485b39300f66" providerId="LiveId" clId="{E14CB0D5-A710-4E49-AABE-D5223A212189}" dt="2026-02-18T08:31:28.489" v="2488" actId="3680"/>
-          <ac:spMkLst>
-            <pc:docMk/>
-            <pc:sldMk cId="3584288316" sldId="269"/>
-            <ac:spMk id="3" creationId="{07821CB3-9442-FF24-329E-C255298B254E}"/>
-          </ac:spMkLst>
-        </pc:spChg>
-        <pc:graphicFrameChg chg="add del mod ord modGraphic">
-          <ac:chgData name="Kushagra Singh" userId="d544485b39300f66" providerId="LiveId" clId="{E14CB0D5-A710-4E49-AABE-D5223A212189}" dt="2026-02-18T08:31:20.583" v="2487" actId="3680"/>
-          <ac:graphicFrameMkLst>
-            <pc:docMk/>
-            <pc:sldMk cId="3584288316" sldId="269"/>
-            <ac:graphicFrameMk id="4" creationId="{9E2E26F2-5355-5D62-7F48-F4369955DCC6}"/>
-          </ac:graphicFrameMkLst>
-        </pc:graphicFrameChg>
-        <pc:graphicFrameChg chg="add mod ord modGraphic">
-          <ac:chgData name="Kushagra Singh" userId="d544485b39300f66" providerId="LiveId" clId="{E14CB0D5-A710-4E49-AABE-D5223A212189}" dt="2026-02-18T08:38:59.866" v="2520" actId="2711"/>
-          <ac:graphicFrameMkLst>
-            <pc:docMk/>
-            <pc:sldMk cId="3584288316" sldId="269"/>
-            <ac:graphicFrameMk id="5" creationId="{4FC7F399-9864-1FA5-F09A-B93586F09EC4}"/>
-          </ac:graphicFrameMkLst>
-        </pc:graphicFrameChg>
-      </pc:sldChg>
-      <pc:sldChg chg="modSp new mod">
-        <pc:chgData name="Kushagra Singh" userId="d544485b39300f66" providerId="LiveId" clId="{E14CB0D5-A710-4E49-AABE-D5223A212189}" dt="2026-02-14T17:45:27.003" v="2081" actId="20577"/>
-        <pc:sldMkLst>
-          <pc:docMk/>
-          <pc:sldMk cId="2423303002" sldId="270"/>
-        </pc:sldMkLst>
-        <pc:spChg chg="mod">
-          <ac:chgData name="Kushagra Singh" userId="d544485b39300f66" providerId="LiveId" clId="{E14CB0D5-A710-4E49-AABE-D5223A212189}" dt="2026-02-14T16:32:12.411" v="1662" actId="2711"/>
-          <ac:spMkLst>
-            <pc:docMk/>
-            <pc:sldMk cId="2423303002" sldId="270"/>
-            <ac:spMk id="2" creationId="{0A65B5CF-D812-3EC4-2A9A-4EBEC2E5AF1E}"/>
-          </ac:spMkLst>
-        </pc:spChg>
-        <pc:spChg chg="mod">
-          <ac:chgData name="Kushagra Singh" userId="d544485b39300f66" providerId="LiveId" clId="{E14CB0D5-A710-4E49-AABE-D5223A212189}" dt="2026-02-14T17:45:27.003" v="2081" actId="20577"/>
-          <ac:spMkLst>
-            <pc:docMk/>
-            <pc:sldMk cId="2423303002" sldId="270"/>
-            <ac:spMk id="3" creationId="{06AE0D52-6201-0B9A-2501-F32B387E807A}"/>
-          </ac:spMkLst>
-        </pc:spChg>
-      </pc:sldChg>
-      <pc:sldChg chg="modSp new mod">
-        <pc:chgData name="Kushagra Singh" userId="d544485b39300f66" providerId="LiveId" clId="{E14CB0D5-A710-4E49-AABE-D5223A212189}" dt="2026-02-14T18:13:24.998" v="2154" actId="20577"/>
-        <pc:sldMkLst>
-          <pc:docMk/>
-          <pc:sldMk cId="4202556726" sldId="271"/>
-        </pc:sldMkLst>
-        <pc:spChg chg="mod">
-          <ac:chgData name="Kushagra Singh" userId="d544485b39300f66" providerId="LiveId" clId="{E14CB0D5-A710-4E49-AABE-D5223A212189}" dt="2026-02-14T16:45:48.694" v="1687" actId="2711"/>
-          <ac:spMkLst>
-            <pc:docMk/>
-            <pc:sldMk cId="4202556726" sldId="271"/>
-            <ac:spMk id="2" creationId="{5EEA8699-25C3-AFF8-4B8F-8F0C72D22FC5}"/>
-          </ac:spMkLst>
-        </pc:spChg>
-        <pc:spChg chg="mod">
-          <ac:chgData name="Kushagra Singh" userId="d544485b39300f66" providerId="LiveId" clId="{E14CB0D5-A710-4E49-AABE-D5223A212189}" dt="2026-02-14T18:13:24.998" v="2154" actId="20577"/>
-          <ac:spMkLst>
-            <pc:docMk/>
-            <pc:sldMk cId="4202556726" sldId="271"/>
-            <ac:spMk id="3" creationId="{A5D0A3B7-4B1C-458D-48D7-EDC26C7721EA}"/>
-          </ac:spMkLst>
-        </pc:spChg>
-      </pc:sldChg>
-      <pc:sldChg chg="modSp new mod">
-        <pc:chgData name="Kushagra Singh" userId="d544485b39300f66" providerId="LiveId" clId="{E14CB0D5-A710-4E49-AABE-D5223A212189}" dt="2026-02-14T17:45:21.002" v="2079" actId="20577"/>
-        <pc:sldMkLst>
-          <pc:docMk/>
-          <pc:sldMk cId="1021870014" sldId="272"/>
-        </pc:sldMkLst>
-        <pc:spChg chg="mod">
-          <ac:chgData name="Kushagra Singh" userId="d544485b39300f66" providerId="LiveId" clId="{E14CB0D5-A710-4E49-AABE-D5223A212189}" dt="2026-02-14T16:32:23.380" v="1663" actId="2711"/>
-          <ac:spMkLst>
-            <pc:docMk/>
-            <pc:sldMk cId="1021870014" sldId="272"/>
-            <ac:spMk id="2" creationId="{35DC1AA8-5EE2-2201-1F4D-704DE754BA4A}"/>
-          </ac:spMkLst>
-        </pc:spChg>
-        <pc:spChg chg="mod">
-          <ac:chgData name="Kushagra Singh" userId="d544485b39300f66" providerId="LiveId" clId="{E14CB0D5-A710-4E49-AABE-D5223A212189}" dt="2026-02-14T17:45:21.002" v="2079" actId="20577"/>
-          <ac:spMkLst>
-            <pc:docMk/>
-            <pc:sldMk cId="1021870014" sldId="272"/>
-            <ac:spMk id="3" creationId="{1CE55C98-7630-9B49-0F1A-2D62BFC5B56F}"/>
-          </ac:spMkLst>
-        </pc:spChg>
-      </pc:sldChg>
-      <pc:sldChg chg="addSp delSp modSp new mod">
-        <pc:chgData name="Kushagra Singh" userId="d544485b39300f66" providerId="LiveId" clId="{E14CB0D5-A710-4E49-AABE-D5223A212189}" dt="2026-02-14T17:33:07.777" v="2076"/>
+      <pc:sldChg chg="addSp delSp modSp mod">
+        <pc:chgData name="Kushagra Singh" userId="d544485b39300f66" providerId="LiveId" clId="{E14CB0D5-A710-4E49-AABE-D5223A212189}" dt="2026-04-10T12:31:54.062" v="3285" actId="20577"/>
         <pc:sldMkLst>
           <pc:docMk/>
           <pc:sldMk cId="639688946" sldId="273"/>
         </pc:sldMkLst>
-        <pc:spChg chg="mod">
-          <ac:chgData name="Kushagra Singh" userId="d544485b39300f66" providerId="LiveId" clId="{E14CB0D5-A710-4E49-AABE-D5223A212189}" dt="2026-02-14T17:07:01.176" v="1715" actId="20577"/>
+        <pc:spChg chg="add del mod">
+          <ac:chgData name="Kushagra Singh" userId="d544485b39300f66" providerId="LiveId" clId="{E14CB0D5-A710-4E49-AABE-D5223A212189}" dt="2026-04-10T12:28:49.617" v="3080" actId="21"/>
           <ac:spMkLst>
             <pc:docMk/>
             <pc:sldMk cId="639688946" sldId="273"/>
-            <ac:spMk id="2" creationId="{7D859742-A515-0F41-1E7D-E5B21444CE76}"/>
+            <ac:spMk id="4" creationId="{6F943BD0-B1C1-0A6D-539A-96FA37019256}"/>
           </ac:spMkLst>
         </pc:spChg>
-        <pc:graphicFrameChg chg="add mod modGraphic">
-          <ac:chgData name="Kushagra Singh" userId="d544485b39300f66" providerId="LiveId" clId="{E14CB0D5-A710-4E49-AABE-D5223A212189}" dt="2026-02-14T17:33:07.777" v="2076"/>
+        <pc:graphicFrameChg chg="mod modGraphic">
+          <ac:chgData name="Kushagra Singh" userId="d544485b39300f66" providerId="LiveId" clId="{E14CB0D5-A710-4E49-AABE-D5223A212189}" dt="2026-04-10T12:31:54.062" v="3285" actId="20577"/>
           <ac:graphicFrameMkLst>
             <pc:docMk/>
             <pc:sldMk cId="639688946" sldId="273"/>
@@ -573,52 +304,99 @@
           </ac:graphicFrameMkLst>
         </pc:graphicFrameChg>
       </pc:sldChg>
-      <pc:sldChg chg="addSp delSp modSp new mod">
-        <pc:chgData name="Kushagra Singh" userId="d544485b39300f66" providerId="LiveId" clId="{E14CB0D5-A710-4E49-AABE-D5223A212189}" dt="2026-02-19T07:15:47.081" v="2617" actId="14100"/>
+      <pc:sldChg chg="addSp delSp modSp mod">
+        <pc:chgData name="Kushagra Singh" userId="d544485b39300f66" providerId="LiveId" clId="{E14CB0D5-A710-4E49-AABE-D5223A212189}" dt="2026-04-10T13:18:35.276" v="3320" actId="21"/>
         <pc:sldMkLst>
           <pc:docMk/>
           <pc:sldMk cId="3310950981" sldId="274"/>
         </pc:sldMkLst>
-        <pc:spChg chg="mod">
-          <ac:chgData name="Kushagra Singh" userId="d544485b39300f66" providerId="LiveId" clId="{E14CB0D5-A710-4E49-AABE-D5223A212189}" dt="2026-02-14T18:08:12.826" v="2102" actId="20577"/>
+        <pc:spChg chg="add del mod">
+          <ac:chgData name="Kushagra Singh" userId="d544485b39300f66" providerId="LiveId" clId="{E14CB0D5-A710-4E49-AABE-D5223A212189}" dt="2026-04-10T13:18:35.276" v="3320" actId="21"/>
           <ac:spMkLst>
             <pc:docMk/>
             <pc:sldMk cId="3310950981" sldId="274"/>
-            <ac:spMk id="2" creationId="{554BEDFC-5FF8-C275-F620-CA26584ACC24}"/>
+            <ac:spMk id="7" creationId="{7654541A-1BB9-3792-B0A8-5A16704B58AE}"/>
           </ac:spMkLst>
         </pc:spChg>
-        <pc:picChg chg="add mod">
-          <ac:chgData name="Kushagra Singh" userId="d544485b39300f66" providerId="LiveId" clId="{E14CB0D5-A710-4E49-AABE-D5223A212189}" dt="2026-02-14T19:36:17.069" v="2361" actId="1076"/>
+        <pc:picChg chg="del">
+          <ac:chgData name="Kushagra Singh" userId="d544485b39300f66" providerId="LiveId" clId="{E14CB0D5-A710-4E49-AABE-D5223A212189}" dt="2026-04-10T13:15:48.072" v="3306" actId="21"/>
           <ac:picMkLst>
             <pc:docMk/>
             <pc:sldMk cId="3310950981" sldId="274"/>
             <ac:picMk id="4" creationId="{3C027FCC-1C07-0DE3-9223-2F9EFC4207BC}"/>
           </ac:picMkLst>
         </pc:picChg>
-        <pc:picChg chg="add mod ord">
-          <ac:chgData name="Kushagra Singh" userId="d544485b39300f66" providerId="LiveId" clId="{E14CB0D5-A710-4E49-AABE-D5223A212189}" dt="2026-02-14T18:09:03.128" v="2109" actId="14100"/>
+        <pc:picChg chg="del">
+          <ac:chgData name="Kushagra Singh" userId="d544485b39300f66" providerId="LiveId" clId="{E14CB0D5-A710-4E49-AABE-D5223A212189}" dt="2026-04-10T13:15:02.981" v="3300" actId="21"/>
           <ac:picMkLst>
             <pc:docMk/>
             <pc:sldMk cId="3310950981" sldId="274"/>
             <ac:picMk id="5" creationId="{FBE11491-3F1B-F7DE-9A79-B795F7355472}"/>
           </ac:picMkLst>
         </pc:picChg>
-        <pc:picChg chg="add mod">
-          <ac:chgData name="Kushagra Singh" userId="d544485b39300f66" providerId="LiveId" clId="{E14CB0D5-A710-4E49-AABE-D5223A212189}" dt="2026-02-19T07:15:47.081" v="2617" actId="14100"/>
+        <pc:picChg chg="del">
+          <ac:chgData name="Kushagra Singh" userId="d544485b39300f66" providerId="LiveId" clId="{E14CB0D5-A710-4E49-AABE-D5223A212189}" dt="2026-04-10T13:16:29.141" v="3311" actId="21"/>
           <ac:picMkLst>
             <pc:docMk/>
             <pc:sldMk cId="3310950981" sldId="274"/>
             <ac:picMk id="6" creationId="{5F6DFEAA-909D-7123-30EC-2CCEA9C78878}"/>
           </ac:picMkLst>
         </pc:picChg>
-        <pc:picChg chg="add del mod">
-          <ac:chgData name="Kushagra Singh" userId="d544485b39300f66" providerId="LiveId" clId="{E14CB0D5-A710-4E49-AABE-D5223A212189}" dt="2026-02-19T07:15:39.882" v="2615" actId="21"/>
+        <pc:picChg chg="add mod">
+          <ac:chgData name="Kushagra Singh" userId="d544485b39300f66" providerId="LiveId" clId="{E14CB0D5-A710-4E49-AABE-D5223A212189}" dt="2026-04-10T13:17:30.282" v="3315" actId="1076"/>
           <ac:picMkLst>
             <pc:docMk/>
             <pc:sldMk cId="3310950981" sldId="274"/>
-            <ac:picMk id="7" creationId="{056231BF-C871-7503-F7B8-3C729D0F1F9B}"/>
+            <ac:picMk id="9" creationId="{04C70438-94AD-772F-3E9A-F664E91B4D31}"/>
           </ac:picMkLst>
         </pc:picChg>
+        <pc:picChg chg="add mod">
+          <ac:chgData name="Kushagra Singh" userId="d544485b39300f66" providerId="LiveId" clId="{E14CB0D5-A710-4E49-AABE-D5223A212189}" dt="2026-04-10T13:17:32.646" v="3316" actId="1076"/>
+          <ac:picMkLst>
+            <pc:docMk/>
+            <pc:sldMk cId="3310950981" sldId="274"/>
+            <ac:picMk id="11" creationId="{31D454E5-A221-95C5-73F2-4DA8ED3F772E}"/>
+          </ac:picMkLst>
+        </pc:picChg>
+        <pc:picChg chg="add mod">
+          <ac:chgData name="Kushagra Singh" userId="d544485b39300f66" providerId="LiveId" clId="{E14CB0D5-A710-4E49-AABE-D5223A212189}" dt="2026-04-10T13:17:14.479" v="3314" actId="1076"/>
+          <ac:picMkLst>
+            <pc:docMk/>
+            <pc:sldMk cId="3310950981" sldId="274"/>
+            <ac:picMk id="13" creationId="{A291BB77-E6CC-3D69-834D-A789781D8457}"/>
+          </ac:picMkLst>
+        </pc:picChg>
+        <pc:picChg chg="add mod">
+          <ac:chgData name="Kushagra Singh" userId="d544485b39300f66" providerId="LiveId" clId="{E14CB0D5-A710-4E49-AABE-D5223A212189}" dt="2026-04-10T13:18:30.274" v="3319" actId="1076"/>
+          <ac:picMkLst>
+            <pc:docMk/>
+            <pc:sldMk cId="3310950981" sldId="274"/>
+            <ac:picMk id="15" creationId="{F723BF3C-5BDB-E570-33E8-AF1DFF35F49C}"/>
+          </ac:picMkLst>
+        </pc:picChg>
+      </pc:sldChg>
+      <pc:sldChg chg="modSp new mod">
+        <pc:chgData name="Kushagra Singh" userId="d544485b39300f66" providerId="LiveId" clId="{E14CB0D5-A710-4E49-AABE-D5223A212189}" dt="2026-04-10T13:22:52.310" v="3718" actId="20577"/>
+        <pc:sldMkLst>
+          <pc:docMk/>
+          <pc:sldMk cId="1591393574" sldId="275"/>
+        </pc:sldMkLst>
+        <pc:spChg chg="mod">
+          <ac:chgData name="Kushagra Singh" userId="d544485b39300f66" providerId="LiveId" clId="{E14CB0D5-A710-4E49-AABE-D5223A212189}" dt="2026-04-10T13:21:52.336" v="3653" actId="20577"/>
+          <ac:spMkLst>
+            <pc:docMk/>
+            <pc:sldMk cId="1591393574" sldId="275"/>
+            <ac:spMk id="2" creationId="{6CDCBF43-AF88-B4A6-66AE-7B5CC984A78A}"/>
+          </ac:spMkLst>
+        </pc:spChg>
+        <pc:spChg chg="mod">
+          <ac:chgData name="Kushagra Singh" userId="d544485b39300f66" providerId="LiveId" clId="{E14CB0D5-A710-4E49-AABE-D5223A212189}" dt="2026-04-10T13:22:52.310" v="3718" actId="20577"/>
+          <ac:spMkLst>
+            <pc:docMk/>
+            <pc:sldMk cId="1591393574" sldId="275"/>
+            <ac:spMk id="3" creationId="{AED999A9-728C-07D3-B8F0-DF74624B239B}"/>
+          </ac:spMkLst>
+        </pc:spChg>
       </pc:sldChg>
     </pc:docChg>
   </pc:docChgLst>
@@ -1398,16 +1176,7 @@
               <a:latin typeface="Times New Roman" panose="02020603050405020304" pitchFamily="18" charset="0"/>
               <a:cs typeface="Times New Roman" panose="02020603050405020304" pitchFamily="18" charset="0"/>
             </a:rPr>
-            <a:t>Data Preprocessing</a:t>
-          </a:r>
-        </a:p>
-        <a:p>
-          <a:r>
-            <a:rPr lang="en-IN" sz="2000" dirty="0">
-              <a:latin typeface="Times New Roman" panose="02020603050405020304" pitchFamily="18" charset="0"/>
-              <a:cs typeface="Times New Roman" panose="02020603050405020304" pitchFamily="18" charset="0"/>
-            </a:rPr>
-            <a:t>(Handling Missing values, label encoding, feature scaling, train test split)</a:t>
+            <a:t>Develop a web-based system</a:t>
           </a:r>
         </a:p>
       </dgm:t>
@@ -1446,7 +1215,7 @@
               <a:latin typeface="Times New Roman" panose="02020603050405020304" pitchFamily="18" charset="0"/>
               <a:cs typeface="Times New Roman" panose="02020603050405020304" pitchFamily="18" charset="0"/>
             </a:rPr>
-            <a:t>Model Training (Random Forest, SVM, KNN, Logistic Regression, Decision Trees, Naïve Bayes)</a:t>
+            <a:t>Use pre-trained ML models</a:t>
           </a:r>
         </a:p>
       </dgm:t>
@@ -1481,11 +1250,11 @@
         <a:lstStyle/>
         <a:p>
           <a:r>
-            <a:rPr lang="en-IN" sz="3600" dirty="0">
+            <a:rPr lang="en-IN" sz="2000" dirty="0">
               <a:latin typeface="Times New Roman" panose="02020603050405020304" pitchFamily="18" charset="0"/>
               <a:cs typeface="Times New Roman" panose="02020603050405020304" pitchFamily="18" charset="0"/>
             </a:rPr>
-            <a:t>Testing</a:t>
+            <a:t>User uploads dataset and selects model</a:t>
           </a:r>
         </a:p>
       </dgm:t>
@@ -1524,7 +1293,7 @@
               <a:latin typeface="Times New Roman" panose="02020603050405020304" pitchFamily="18" charset="0"/>
               <a:cs typeface="Times New Roman" panose="02020603050405020304" pitchFamily="18" charset="0"/>
             </a:rPr>
-            <a:t>Evaluation (Accuracy, Precision, Recall, F1-score, Confusion matrix)</a:t>
+            <a:t>System performs prediction </a:t>
           </a:r>
         </a:p>
       </dgm:t>
@@ -1563,7 +1332,7 @@
               <a:latin typeface="Times New Roman" panose="02020603050405020304" pitchFamily="18" charset="0"/>
               <a:cs typeface="Times New Roman" panose="02020603050405020304" pitchFamily="18" charset="0"/>
             </a:rPr>
-            <a:t>Choosing the best Algorithm</a:t>
+            <a:t>Displays results and analysis.</a:t>
           </a:r>
         </a:p>
       </dgm:t>
@@ -1877,28 +1646,7 @@
               <a:latin typeface="Times New Roman" panose="02020603050405020304" pitchFamily="18" charset="0"/>
               <a:cs typeface="Times New Roman" panose="02020603050405020304" pitchFamily="18" charset="0"/>
             </a:rPr>
-            <a:t>Data Preprocessing</a:t>
-          </a:r>
-        </a:p>
-        <a:p>
-          <a:pPr marL="0" lvl="0" indent="0" algn="ctr" defTabSz="889000">
-            <a:lnSpc>
-              <a:spcPct val="90000"/>
-            </a:lnSpc>
-            <a:spcBef>
-              <a:spcPct val="0"/>
-            </a:spcBef>
-            <a:spcAft>
-              <a:spcPct val="35000"/>
-            </a:spcAft>
-            <a:buNone/>
-          </a:pPr>
-          <a:r>
-            <a:rPr lang="en-IN" sz="2000" kern="1200" dirty="0">
-              <a:latin typeface="Times New Roman" panose="02020603050405020304" pitchFamily="18" charset="0"/>
-              <a:cs typeface="Times New Roman" panose="02020603050405020304" pitchFamily="18" charset="0"/>
-            </a:rPr>
-            <a:t>(Handling Missing values, label encoding, feature scaling, train test split)</a:t>
+            <a:t>Develop a web-based system</a:t>
           </a:r>
         </a:p>
       </dsp:txBody>
@@ -2066,7 +1814,7 @@
               <a:latin typeface="Times New Roman" panose="02020603050405020304" pitchFamily="18" charset="0"/>
               <a:cs typeface="Times New Roman" panose="02020603050405020304" pitchFamily="18" charset="0"/>
             </a:rPr>
-            <a:t>Model Training (Random Forest, SVM, KNN, Logistic Regression, Decision Trees, Naïve Bayes)</a:t>
+            <a:t>Use pre-trained ML models</a:t>
           </a:r>
         </a:p>
       </dsp:txBody>
@@ -2212,12 +1960,12 @@
         </a:fontRef>
       </dsp:style>
       <dsp:txBody>
-        <a:bodyPr spcFirstLastPara="0" vert="horz" wrap="square" lIns="256032" tIns="256032" rIns="256032" bIns="256032" numCol="1" spcCol="1270" anchor="ctr" anchorCtr="0">
+        <a:bodyPr spcFirstLastPara="0" vert="horz" wrap="square" lIns="142240" tIns="142240" rIns="142240" bIns="142240" numCol="1" spcCol="1270" anchor="ctr" anchorCtr="0">
           <a:noAutofit/>
         </a:bodyPr>
         <a:lstStyle/>
         <a:p>
-          <a:pPr marL="0" lvl="0" indent="0" algn="ctr" defTabSz="1600200">
+          <a:pPr marL="0" lvl="0" indent="0" algn="ctr" defTabSz="889000">
             <a:lnSpc>
               <a:spcPct val="90000"/>
             </a:lnSpc>
@@ -2230,11 +1978,11 @@
             <a:buNone/>
           </a:pPr>
           <a:r>
-            <a:rPr lang="en-IN" sz="3600" kern="1200" dirty="0">
+            <a:rPr lang="en-IN" sz="2000" kern="1200" dirty="0">
               <a:latin typeface="Times New Roman" panose="02020603050405020304" pitchFamily="18" charset="0"/>
               <a:cs typeface="Times New Roman" panose="02020603050405020304" pitchFamily="18" charset="0"/>
             </a:rPr>
-            <a:t>Testing</a:t>
+            <a:t>User uploads dataset and selects model</a:t>
           </a:r>
         </a:p>
       </dsp:txBody>
@@ -2396,7 +2144,7 @@
               <a:latin typeface="Times New Roman" panose="02020603050405020304" pitchFamily="18" charset="0"/>
               <a:cs typeface="Times New Roman" panose="02020603050405020304" pitchFamily="18" charset="0"/>
             </a:rPr>
-            <a:t>Evaluation (Accuracy, Precision, Recall, F1-score, Confusion matrix)</a:t>
+            <a:t>System performs prediction </a:t>
           </a:r>
         </a:p>
       </dsp:txBody>
@@ -2477,7 +2225,7 @@
               <a:latin typeface="Times New Roman" panose="02020603050405020304" pitchFamily="18" charset="0"/>
               <a:cs typeface="Times New Roman" panose="02020603050405020304" pitchFamily="18" charset="0"/>
             </a:rPr>
-            <a:t>Choosing the best Algorithm</a:t>
+            <a:t>Displays results and analysis.</a:t>
           </a:r>
         </a:p>
       </dsp:txBody>
@@ -3794,7 +3542,7 @@
           <a:p>
             <a:fld id="{89DAAEFB-A47B-4BD5-B1A5-31424B0907FC}" type="datetimeFigureOut">
               <a:rPr lang="en-IN" smtClean="0"/>
-              <a:t>19-02-2026</a:t>
+              <a:t>10-04-2026</a:t>
             </a:fld>
             <a:endParaRPr lang="en-IN"/>
           </a:p>
@@ -4295,7 +4043,7 @@
           <a:p>
             <a:fld id="{A7FACB4A-C46D-47C8-95BF-463F9F428625}" type="datetimeFigureOut">
               <a:rPr lang="en-IN" smtClean="0"/>
-              <a:t>19-02-2026</a:t>
+              <a:t>10-04-2026</a:t>
             </a:fld>
             <a:endParaRPr lang="en-IN"/>
           </a:p>
@@ -4495,7 +4243,7 @@
           <a:p>
             <a:fld id="{A7FACB4A-C46D-47C8-95BF-463F9F428625}" type="datetimeFigureOut">
               <a:rPr lang="en-IN" smtClean="0"/>
-              <a:t>19-02-2026</a:t>
+              <a:t>10-04-2026</a:t>
             </a:fld>
             <a:endParaRPr lang="en-IN"/>
           </a:p>
@@ -4705,7 +4453,7 @@
           <a:p>
             <a:fld id="{A7FACB4A-C46D-47C8-95BF-463F9F428625}" type="datetimeFigureOut">
               <a:rPr lang="en-IN" smtClean="0"/>
-              <a:t>19-02-2026</a:t>
+              <a:t>10-04-2026</a:t>
             </a:fld>
             <a:endParaRPr lang="en-IN"/>
           </a:p>
@@ -4905,7 +4653,7 @@
           <a:p>
             <a:fld id="{A7FACB4A-C46D-47C8-95BF-463F9F428625}" type="datetimeFigureOut">
               <a:rPr lang="en-IN" smtClean="0"/>
-              <a:t>19-02-2026</a:t>
+              <a:t>10-04-2026</a:t>
             </a:fld>
             <a:endParaRPr lang="en-IN"/>
           </a:p>
@@ -5181,7 +4929,7 @@
           <a:p>
             <a:fld id="{A7FACB4A-C46D-47C8-95BF-463F9F428625}" type="datetimeFigureOut">
               <a:rPr lang="en-IN" smtClean="0"/>
-              <a:t>19-02-2026</a:t>
+              <a:t>10-04-2026</a:t>
             </a:fld>
             <a:endParaRPr lang="en-IN"/>
           </a:p>
@@ -5449,7 +5197,7 @@
           <a:p>
             <a:fld id="{A7FACB4A-C46D-47C8-95BF-463F9F428625}" type="datetimeFigureOut">
               <a:rPr lang="en-IN" smtClean="0"/>
-              <a:t>19-02-2026</a:t>
+              <a:t>10-04-2026</a:t>
             </a:fld>
             <a:endParaRPr lang="en-IN"/>
           </a:p>
@@ -5864,7 +5612,7 @@
           <a:p>
             <a:fld id="{A7FACB4A-C46D-47C8-95BF-463F9F428625}" type="datetimeFigureOut">
               <a:rPr lang="en-IN" smtClean="0"/>
-              <a:t>19-02-2026</a:t>
+              <a:t>10-04-2026</a:t>
             </a:fld>
             <a:endParaRPr lang="en-IN"/>
           </a:p>
@@ -6006,7 +5754,7 @@
           <a:p>
             <a:fld id="{A7FACB4A-C46D-47C8-95BF-463F9F428625}" type="datetimeFigureOut">
               <a:rPr lang="en-IN" smtClean="0"/>
-              <a:t>19-02-2026</a:t>
+              <a:t>10-04-2026</a:t>
             </a:fld>
             <a:endParaRPr lang="en-IN"/>
           </a:p>
@@ -6119,7 +5867,7 @@
           <a:p>
             <a:fld id="{A7FACB4A-C46D-47C8-95BF-463F9F428625}" type="datetimeFigureOut">
               <a:rPr lang="en-IN" smtClean="0"/>
-              <a:t>19-02-2026</a:t>
+              <a:t>10-04-2026</a:t>
             </a:fld>
             <a:endParaRPr lang="en-IN"/>
           </a:p>
@@ -6432,7 +6180,7 @@
           <a:p>
             <a:fld id="{A7FACB4A-C46D-47C8-95BF-463F9F428625}" type="datetimeFigureOut">
               <a:rPr lang="en-IN" smtClean="0"/>
-              <a:t>19-02-2026</a:t>
+              <a:t>10-04-2026</a:t>
             </a:fld>
             <a:endParaRPr lang="en-IN"/>
           </a:p>
@@ -6721,7 +6469,7 @@
           <a:p>
             <a:fld id="{A7FACB4A-C46D-47C8-95BF-463F9F428625}" type="datetimeFigureOut">
               <a:rPr lang="en-IN" smtClean="0"/>
-              <a:t>19-02-2026</a:t>
+              <a:t>10-04-2026</a:t>
             </a:fld>
             <a:endParaRPr lang="en-IN"/>
           </a:p>
@@ -6964,7 +6712,7 @@
           <a:p>
             <a:fld id="{A7FACB4A-C46D-47C8-95BF-463F9F428625}" type="datetimeFigureOut">
               <a:rPr lang="en-IN" smtClean="0"/>
-              <a:t>19-02-2026</a:t>
+              <a:t>10-04-2026</a:t>
             </a:fld>
             <a:endParaRPr lang="en-IN"/>
           </a:p>
@@ -8435,50 +8183,37 @@
           </a:p>
         </p:txBody>
       </p:sp>
-      <p:pic>
-        <p:nvPicPr>
-          <p:cNvPr id="5" name="Content Placeholder 4">
+      <p:sp>
+        <p:nvSpPr>
+          <p:cNvPr id="6" name="Content Placeholder 5">
             <a:extLst>
               <a:ext uri="{FF2B5EF4-FFF2-40B4-BE49-F238E27FC236}">
-                <a16:creationId xmlns:a16="http://schemas.microsoft.com/office/drawing/2014/main" id="{40798494-FD85-F359-75EB-D7F79A9FB845}"/>
+                <a16:creationId xmlns:a16="http://schemas.microsoft.com/office/drawing/2014/main" id="{EB2789D3-341D-7AD5-B583-8F9DB373EE11}"/>
               </a:ext>
             </a:extLst>
           </p:cNvPr>
-          <p:cNvPicPr>
-            <a:picLocks noGrp="1" noChangeAspect="1"/>
-          </p:cNvPicPr>
+          <p:cNvSpPr>
+            <a:spLocks noGrp="1"/>
+          </p:cNvSpPr>
           <p:nvPr>
             <p:ph idx="1"/>
           </p:nvPr>
-        </p:nvPicPr>
-        <p:blipFill>
-          <a:blip r:embed="rId2">
-            <a:extLst>
-              <a:ext uri="{28A0092B-C50C-407E-A947-70E740481C1C}">
-                <a14:useLocalDpi xmlns:a14="http://schemas.microsoft.com/office/drawing/2010/main" val="0"/>
-              </a:ext>
-            </a:extLst>
-          </a:blip>
-          <a:stretch>
-            <a:fillRect/>
-          </a:stretch>
-        </p:blipFill>
-        <p:spPr>
-          <a:xfrm>
-            <a:off x="184005" y="1602602"/>
-            <a:ext cx="5484856" cy="4129126"/>
-          </a:xfrm>
-          <a:prstGeom prst="rect">
-            <a:avLst/>
-          </a:prstGeom>
-        </p:spPr>
-      </p:pic>
+        </p:nvSpPr>
+        <p:spPr/>
+        <p:txBody>
+          <a:bodyPr/>
+          <a:lstStyle/>
+          <a:p>
+            <a:endParaRPr lang="en-IN" dirty="0"/>
+          </a:p>
+        </p:txBody>
+      </p:sp>
       <p:pic>
         <p:nvPicPr>
-          <p:cNvPr id="7" name="Picture 6">
+          <p:cNvPr id="9" name="Picture 8">
             <a:extLst>
               <a:ext uri="{FF2B5EF4-FFF2-40B4-BE49-F238E27FC236}">
-                <a16:creationId xmlns:a16="http://schemas.microsoft.com/office/drawing/2014/main" id="{B9DB7BB6-87DA-231C-9DE3-DF8F54E76E00}"/>
+                <a16:creationId xmlns:a16="http://schemas.microsoft.com/office/drawing/2014/main" id="{1C708ED2-AF14-A4C5-6FC7-F002F9A8DC72}"/>
               </a:ext>
             </a:extLst>
           </p:cNvPr>
@@ -8488,21 +8223,15 @@
           <p:nvPr/>
         </p:nvPicPr>
         <p:blipFill>
-          <a:blip r:embed="rId3">
-            <a:extLst>
-              <a:ext uri="{28A0092B-C50C-407E-A947-70E740481C1C}">
-                <a14:useLocalDpi xmlns:a14="http://schemas.microsoft.com/office/drawing/2010/main" val="0"/>
-              </a:ext>
-            </a:extLst>
-          </a:blip>
+          <a:blip r:embed="rId2"/>
           <a:stretch>
             <a:fillRect/>
           </a:stretch>
         </p:blipFill>
         <p:spPr>
           <a:xfrm>
-            <a:off x="5781843" y="0"/>
-            <a:ext cx="5571957" cy="3557239"/>
+            <a:off x="838200" y="1514167"/>
+            <a:ext cx="4079667" cy="2677759"/>
           </a:xfrm>
           <a:prstGeom prst="rect">
             <a:avLst/>
@@ -8511,10 +8240,10 @@
       </p:pic>
       <p:pic>
         <p:nvPicPr>
-          <p:cNvPr id="4" name="Picture 3">
+          <p:cNvPr id="11" name="Picture 10">
             <a:extLst>
               <a:ext uri="{FF2B5EF4-FFF2-40B4-BE49-F238E27FC236}">
-                <a16:creationId xmlns:a16="http://schemas.microsoft.com/office/drawing/2014/main" id="{58552263-B93E-6686-AF1F-94FF4ADD2CCE}"/>
+                <a16:creationId xmlns:a16="http://schemas.microsoft.com/office/drawing/2014/main" id="{32A8E0A0-845A-1795-785D-284320F3639C}"/>
               </a:ext>
             </a:extLst>
           </p:cNvPr>
@@ -8524,21 +8253,45 @@
           <p:nvPr/>
         </p:nvPicPr>
         <p:blipFill>
-          <a:blip r:embed="rId4">
-            <a:extLst>
-              <a:ext uri="{28A0092B-C50C-407E-A947-70E740481C1C}">
-                <a14:useLocalDpi xmlns:a14="http://schemas.microsoft.com/office/drawing/2010/main" val="0"/>
-              </a:ext>
-            </a:extLst>
-          </a:blip>
+          <a:blip r:embed="rId3"/>
           <a:stretch>
             <a:fillRect/>
           </a:stretch>
         </p:blipFill>
         <p:spPr>
           <a:xfrm>
-            <a:off x="6289288" y="3429000"/>
-            <a:ext cx="5263375" cy="3311102"/>
+            <a:off x="7274135" y="223902"/>
+            <a:ext cx="4448523" cy="2580529"/>
+          </a:xfrm>
+          <a:prstGeom prst="rect">
+            <a:avLst/>
+          </a:prstGeom>
+        </p:spPr>
+      </p:pic>
+      <p:pic>
+        <p:nvPicPr>
+          <p:cNvPr id="13" name="Picture 12">
+            <a:extLst>
+              <a:ext uri="{FF2B5EF4-FFF2-40B4-BE49-F238E27FC236}">
+                <a16:creationId xmlns:a16="http://schemas.microsoft.com/office/drawing/2014/main" id="{A4B81988-1DAB-A33D-3D75-A88BC31AB7C8}"/>
+              </a:ext>
+            </a:extLst>
+          </p:cNvPr>
+          <p:cNvPicPr>
+            <a:picLocks noChangeAspect="1"/>
+          </p:cNvPicPr>
+          <p:nvPr/>
+        </p:nvPicPr>
+        <p:blipFill>
+          <a:blip r:embed="rId4"/>
+          <a:stretch>
+            <a:fillRect/>
+          </a:stretch>
+        </p:blipFill>
+        <p:spPr>
+          <a:xfrm>
+            <a:off x="5271865" y="3057832"/>
+            <a:ext cx="4511828" cy="3800168"/>
           </a:xfrm>
           <a:prstGeom prst="rect">
             <a:avLst/>
@@ -8608,48 +8361,10 @@
       </p:sp>
       <p:pic>
         <p:nvPicPr>
-          <p:cNvPr id="5" name="Content Placeholder 4">
+          <p:cNvPr id="9" name="Picture 8">
             <a:extLst>
               <a:ext uri="{FF2B5EF4-FFF2-40B4-BE49-F238E27FC236}">
-                <a16:creationId xmlns:a16="http://schemas.microsoft.com/office/drawing/2014/main" id="{FBE11491-3F1B-F7DE-9A79-B795F7355472}"/>
-              </a:ext>
-            </a:extLst>
-          </p:cNvPr>
-          <p:cNvPicPr>
-            <a:picLocks noGrp="1" noChangeAspect="1"/>
-          </p:cNvPicPr>
-          <p:nvPr>
-            <p:ph idx="1"/>
-          </p:nvPr>
-        </p:nvPicPr>
-        <p:blipFill>
-          <a:blip r:embed="rId2">
-            <a:extLst>
-              <a:ext uri="{28A0092B-C50C-407E-A947-70E740481C1C}">
-                <a14:useLocalDpi xmlns:a14="http://schemas.microsoft.com/office/drawing/2010/main" val="0"/>
-              </a:ext>
-            </a:extLst>
-          </a:blip>
-          <a:stretch>
-            <a:fillRect/>
-          </a:stretch>
-        </p:blipFill>
-        <p:spPr>
-          <a:xfrm>
-            <a:off x="712921" y="1602601"/>
-            <a:ext cx="5141469" cy="4351338"/>
-          </a:xfrm>
-          <a:prstGeom prst="rect">
-            <a:avLst/>
-          </a:prstGeom>
-        </p:spPr>
-      </p:pic>
-      <p:pic>
-        <p:nvPicPr>
-          <p:cNvPr id="4" name="Picture 3">
-            <a:extLst>
-              <a:ext uri="{FF2B5EF4-FFF2-40B4-BE49-F238E27FC236}">
-                <a16:creationId xmlns:a16="http://schemas.microsoft.com/office/drawing/2014/main" id="{3C027FCC-1C07-0DE3-9223-2F9EFC4207BC}"/>
+                <a16:creationId xmlns:a16="http://schemas.microsoft.com/office/drawing/2014/main" id="{04C70438-94AD-772F-3E9A-F664E91B4D31}"/>
               </a:ext>
             </a:extLst>
           </p:cNvPr>
@@ -8659,21 +8374,15 @@
           <p:nvPr/>
         </p:nvPicPr>
         <p:blipFill>
-          <a:blip r:embed="rId3">
-            <a:extLst>
-              <a:ext uri="{28A0092B-C50C-407E-A947-70E740481C1C}">
-                <a14:useLocalDpi xmlns:a14="http://schemas.microsoft.com/office/drawing/2010/main" val="0"/>
-              </a:ext>
-            </a:extLst>
-          </a:blip>
+          <a:blip r:embed="rId2"/>
           <a:stretch>
             <a:fillRect/>
           </a:stretch>
         </p:blipFill>
         <p:spPr>
           <a:xfrm>
-            <a:off x="7059289" y="4447343"/>
-            <a:ext cx="3515216" cy="1390844"/>
+            <a:off x="100780" y="127786"/>
+            <a:ext cx="5335272" cy="3301214"/>
           </a:xfrm>
           <a:prstGeom prst="rect">
             <a:avLst/>
@@ -8682,10 +8391,40 @@
       </p:pic>
       <p:pic>
         <p:nvPicPr>
-          <p:cNvPr id="6" name="Picture 5">
+          <p:cNvPr id="11" name="Picture 10">
             <a:extLst>
               <a:ext uri="{FF2B5EF4-FFF2-40B4-BE49-F238E27FC236}">
-                <a16:creationId xmlns:a16="http://schemas.microsoft.com/office/drawing/2014/main" id="{5F6DFEAA-909D-7123-30EC-2CCEA9C78878}"/>
+                <a16:creationId xmlns:a16="http://schemas.microsoft.com/office/drawing/2014/main" id="{31D454E5-A221-95C5-73F2-4DA8ED3F772E}"/>
+              </a:ext>
+            </a:extLst>
+          </p:cNvPr>
+          <p:cNvPicPr>
+            <a:picLocks noChangeAspect="1"/>
+          </p:cNvPicPr>
+          <p:nvPr/>
+        </p:nvPicPr>
+        <p:blipFill>
+          <a:blip r:embed="rId3"/>
+          <a:stretch>
+            <a:fillRect/>
+          </a:stretch>
+        </p:blipFill>
+        <p:spPr>
+          <a:xfrm>
+            <a:off x="7097969" y="3696093"/>
+            <a:ext cx="4760595" cy="2991257"/>
+          </a:xfrm>
+          <a:prstGeom prst="rect">
+            <a:avLst/>
+          </a:prstGeom>
+        </p:spPr>
+      </p:pic>
+      <p:pic>
+        <p:nvPicPr>
+          <p:cNvPr id="13" name="Picture 12">
+            <a:extLst>
+              <a:ext uri="{FF2B5EF4-FFF2-40B4-BE49-F238E27FC236}">
+                <a16:creationId xmlns:a16="http://schemas.microsoft.com/office/drawing/2014/main" id="{A291BB77-E6CC-3D69-834D-A789781D8457}"/>
               </a:ext>
             </a:extLst>
           </p:cNvPr>
@@ -8702,8 +8441,38 @@
         </p:blipFill>
         <p:spPr>
           <a:xfrm>
-            <a:off x="5979669" y="481936"/>
-            <a:ext cx="5872905" cy="1600423"/>
+            <a:off x="6397514" y="111112"/>
+            <a:ext cx="5461050" cy="2991257"/>
+          </a:xfrm>
+          <a:prstGeom prst="rect">
+            <a:avLst/>
+          </a:prstGeom>
+        </p:spPr>
+      </p:pic>
+      <p:pic>
+        <p:nvPicPr>
+          <p:cNvPr id="15" name="Picture 14">
+            <a:extLst>
+              <a:ext uri="{FF2B5EF4-FFF2-40B4-BE49-F238E27FC236}">
+                <a16:creationId xmlns:a16="http://schemas.microsoft.com/office/drawing/2014/main" id="{F723BF3C-5BDB-E570-33E8-AF1DFF35F49C}"/>
+              </a:ext>
+            </a:extLst>
+          </p:cNvPr>
+          <p:cNvPicPr>
+            <a:picLocks noChangeAspect="1"/>
+          </p:cNvPicPr>
+          <p:nvPr/>
+        </p:nvPicPr>
+        <p:blipFill>
+          <a:blip r:embed="rId5"/>
+          <a:stretch>
+            <a:fillRect/>
+          </a:stretch>
+        </p:blipFill>
+        <p:spPr>
+          <a:xfrm>
+            <a:off x="179577" y="3614483"/>
+            <a:ext cx="5680450" cy="3154476"/>
           </a:xfrm>
           <a:prstGeom prst="rect">
             <a:avLst/>
@@ -8762,16 +8531,12 @@
           <a:lstStyle/>
           <a:p>
             <a:r>
-              <a:rPr lang="en-US">
+              <a:rPr lang="en-US" dirty="0">
                 <a:latin typeface="Times New Roman" panose="02020603050405020304" pitchFamily="18" charset="0"/>
                 <a:cs typeface="Times New Roman" panose="02020603050405020304" pitchFamily="18" charset="0"/>
               </a:rPr>
               <a:t>Outcomes</a:t>
             </a:r>
-            <a:endParaRPr lang="en-US" dirty="0">
-              <a:latin typeface="Times New Roman" panose="02020603050405020304" pitchFamily="18" charset="0"/>
-              <a:cs typeface="Times New Roman" panose="02020603050405020304" pitchFamily="18" charset="0"/>
-            </a:endParaRPr>
           </a:p>
         </p:txBody>
       </p:sp>
@@ -8801,7 +8566,7 @@
                 <a:latin typeface="Times New Roman" panose="02020603050405020304" pitchFamily="18" charset="0"/>
                 <a:cs typeface="Times New Roman" panose="02020603050405020304" pitchFamily="18" charset="0"/>
               </a:rPr>
-              <a:t> Comparative analysis of ML models completed</a:t>
+              <a:t>Developed a functional Anomaly Detection System</a:t>
             </a:r>
           </a:p>
           <a:p>
@@ -8810,7 +8575,7 @@
                 <a:latin typeface="Times New Roman" panose="02020603050405020304" pitchFamily="18" charset="0"/>
                 <a:cs typeface="Times New Roman" panose="02020603050405020304" pitchFamily="18" charset="0"/>
               </a:rPr>
-              <a:t> Performance evaluation completed</a:t>
+              <a:t>Integrated Machine Learning with Web Interface</a:t>
             </a:r>
           </a:p>
           <a:p>
@@ -8819,16 +8584,7 @@
                 <a:latin typeface="Times New Roman" panose="02020603050405020304" pitchFamily="18" charset="0"/>
                 <a:cs typeface="Times New Roman" panose="02020603050405020304" pitchFamily="18" charset="0"/>
               </a:rPr>
-              <a:t> Best model identified (Random Forest)</a:t>
-            </a:r>
-          </a:p>
-          <a:p>
-            <a:r>
-              <a:rPr lang="en-US" dirty="0">
-                <a:latin typeface="Times New Roman" panose="02020603050405020304" pitchFamily="18" charset="0"/>
-                <a:cs typeface="Times New Roman" panose="02020603050405020304" pitchFamily="18" charset="0"/>
-              </a:rPr>
-              <a:t> Graphical analysis generated</a:t>
+              <a:t>Enabled Real Time Dataset Analysis</a:t>
             </a:r>
           </a:p>
           <a:p>
@@ -8839,21 +8595,6 @@
               <a:latin typeface="Times New Roman" panose="02020603050405020304" pitchFamily="18" charset="0"/>
               <a:cs typeface="Times New Roman" panose="02020603050405020304" pitchFamily="18" charset="0"/>
             </a:endParaRPr>
-          </a:p>
-          <a:p>
-            <a:pPr marL="0" indent="0">
-              <a:buNone/>
-            </a:pPr>
-            <a:endParaRPr lang="en-US" dirty="0">
-              <a:latin typeface="Times New Roman" panose="02020603050405020304" pitchFamily="18" charset="0"/>
-              <a:cs typeface="Times New Roman" panose="02020603050405020304" pitchFamily="18" charset="0"/>
-            </a:endParaRPr>
-          </a:p>
-          <a:p>
-            <a:pPr marL="0" indent="0">
-              <a:buNone/>
-            </a:pPr>
-            <a:endParaRPr lang="en-US" dirty="0"/>
           </a:p>
         </p:txBody>
       </p:sp>
@@ -8871,6 +8612,101 @@
 </file>
 
 <file path=ppt/slides/slide17.xml><?xml version="1.0" encoding="utf-8"?>
+<p:sld xmlns:a="http://schemas.openxmlformats.org/drawingml/2006/main" xmlns:r="http://schemas.openxmlformats.org/officeDocument/2006/relationships" xmlns:p="http://schemas.openxmlformats.org/presentationml/2006/main">
+  <p:cSld>
+    <p:spTree>
+      <p:nvGrpSpPr>
+        <p:cNvPr id="1" name=""/>
+        <p:cNvGrpSpPr/>
+        <p:nvPr/>
+      </p:nvGrpSpPr>
+      <p:grpSpPr>
+        <a:xfrm>
+          <a:off x="0" y="0"/>
+          <a:ext cx="0" cy="0"/>
+          <a:chOff x="0" y="0"/>
+          <a:chExt cx="0" cy="0"/>
+        </a:xfrm>
+      </p:grpSpPr>
+      <p:sp>
+        <p:nvSpPr>
+          <p:cNvPr id="2" name="Title 1">
+            <a:extLst>
+              <a:ext uri="{FF2B5EF4-FFF2-40B4-BE49-F238E27FC236}">
+                <a16:creationId xmlns:a16="http://schemas.microsoft.com/office/drawing/2014/main" id="{6CDCBF43-AF88-B4A6-66AE-7B5CC984A78A}"/>
+              </a:ext>
+            </a:extLst>
+          </p:cNvPr>
+          <p:cNvSpPr>
+            <a:spLocks noGrp="1"/>
+          </p:cNvSpPr>
+          <p:nvPr>
+            <p:ph type="title"/>
+          </p:nvPr>
+        </p:nvSpPr>
+        <p:spPr/>
+        <p:txBody>
+          <a:bodyPr/>
+          <a:lstStyle/>
+          <a:p>
+            <a:r>
+              <a:rPr lang="en-IN" dirty="0">
+                <a:latin typeface="Times New Roman" panose="02020603050405020304" pitchFamily="18" charset="0"/>
+                <a:cs typeface="Times New Roman" panose="02020603050405020304" pitchFamily="18" charset="0"/>
+              </a:rPr>
+              <a:t>Future Work</a:t>
+            </a:r>
+          </a:p>
+        </p:txBody>
+      </p:sp>
+      <p:sp>
+        <p:nvSpPr>
+          <p:cNvPr id="3" name="Content Placeholder 2">
+            <a:extLst>
+              <a:ext uri="{FF2B5EF4-FFF2-40B4-BE49-F238E27FC236}">
+                <a16:creationId xmlns:a16="http://schemas.microsoft.com/office/drawing/2014/main" id="{AED999A9-728C-07D3-B8F0-DF74624B239B}"/>
+              </a:ext>
+            </a:extLst>
+          </p:cNvPr>
+          <p:cNvSpPr>
+            <a:spLocks noGrp="1"/>
+          </p:cNvSpPr>
+          <p:nvPr>
+            <p:ph idx="1"/>
+          </p:nvPr>
+        </p:nvSpPr>
+        <p:spPr/>
+        <p:txBody>
+          <a:bodyPr/>
+          <a:lstStyle/>
+          <a:p>
+            <a:r>
+              <a:rPr lang="en-IN" dirty="0"/>
+              <a:t>Add Multi Dataset support</a:t>
+            </a:r>
+          </a:p>
+          <a:p>
+            <a:r>
+              <a:rPr lang="en-IN" dirty="0"/>
+              <a:t>Integrate Feature Importance Analysis</a:t>
+            </a:r>
+          </a:p>
+        </p:txBody>
+      </p:sp>
+    </p:spTree>
+    <p:extLst>
+      <p:ext uri="{BB962C8B-B14F-4D97-AF65-F5344CB8AC3E}">
+        <p14:creationId xmlns:p14="http://schemas.microsoft.com/office/powerpoint/2010/main" val="1591393574"/>
+      </p:ext>
+    </p:extLst>
+  </p:cSld>
+  <p:clrMapOvr>
+    <a:masterClrMapping/>
+  </p:clrMapOvr>
+</p:sld>
+</file>
+
+<file path=ppt/slides/slide18.xml><?xml version="1.0" encoding="utf-8"?>
 <p:sld xmlns:a="http://schemas.openxmlformats.org/drawingml/2006/main" xmlns:r="http://schemas.openxmlformats.org/officeDocument/2006/relationships" xmlns:p="http://schemas.openxmlformats.org/presentationml/2006/main">
   <p:cSld>
     <p:spTree>
@@ -9051,8 +8887,8 @@
         </p:nvSpPr>
         <p:spPr bwMode="auto">
           <a:xfrm>
-            <a:off x="446049" y="2559884"/>
-            <a:ext cx="11696151" cy="2585323"/>
+            <a:off x="446049" y="2375218"/>
+            <a:ext cx="11696151" cy="2954655"/>
           </a:xfrm>
           <a:prstGeom prst="rect">
             <a:avLst/>
@@ -9232,6 +9068,36 @@
             </a:r>
           </a:p>
           <a:p>
+            <a:pPr marL="285750" lvl="0" indent="-285750" eaLnBrk="0" fontAlgn="base" hangingPunct="0">
+              <a:spcBef>
+                <a:spcPct val="0"/>
+              </a:spcBef>
+              <a:spcAft>
+                <a:spcPct val="0"/>
+              </a:spcAft>
+              <a:buFont typeface="Arial" panose="020B0604020202020204" pitchFamily="34" charset="0"/>
+              <a:buChar char="•"/>
+            </a:pPr>
+            <a:r>
+              <a:rPr lang="en-IN" sz="2400" dirty="0" err="1">
+                <a:latin typeface="Times New Roman" panose="02020603050405020304" pitchFamily="18" charset="0"/>
+                <a:cs typeface="Times New Roman" panose="02020603050405020304" pitchFamily="18" charset="0"/>
+              </a:rPr>
+              <a:t>Streamlit</a:t>
+            </a:r>
+            <a:r>
+              <a:rPr lang="en-IN" sz="2400" dirty="0">
+                <a:latin typeface="Times New Roman" panose="02020603050405020304" pitchFamily="18" charset="0"/>
+                <a:cs typeface="Times New Roman" panose="02020603050405020304" pitchFamily="18" charset="0"/>
+              </a:rPr>
+              <a:t> Documentation</a:t>
+            </a:r>
+            <a:endParaRPr lang="en-US" altLang="en-US" sz="2400" dirty="0">
+              <a:latin typeface="Times New Roman" panose="02020603050405020304" pitchFamily="18" charset="0"/>
+              <a:cs typeface="Times New Roman" panose="02020603050405020304" pitchFamily="18" charset="0"/>
+            </a:endParaRPr>
+          </a:p>
+          <a:p>
             <a:pPr marL="0" marR="0" lvl="0" indent="0" algn="l" defTabSz="914400" rtl="0" eaLnBrk="0" fontAlgn="base" latinLnBrk="0" hangingPunct="0">
               <a:lnSpc>
                 <a:spcPct val="100000"/>
@@ -9274,7 +9140,7 @@
 </p:sld>
 </file>
 
-<file path=ppt/slides/slide18.xml><?xml version="1.0" encoding="utf-8"?>
+<file path=ppt/slides/slide19.xml><?xml version="1.0" encoding="utf-8"?>
 <p:sld xmlns:a="http://schemas.openxmlformats.org/drawingml/2006/main" xmlns:r="http://schemas.openxmlformats.org/officeDocument/2006/relationships" xmlns:p="http://schemas.openxmlformats.org/presentationml/2006/main">
   <p:cSld>
     <p:spTree>
@@ -11065,14 +10931,8 @@
                 <a:latin typeface="Times New Roman" panose="02020603050405020304" pitchFamily="18" charset="0"/>
                 <a:cs typeface="Times New Roman" panose="02020603050405020304" pitchFamily="18" charset="0"/>
               </a:rPr>
-              <a:t>“Which machine learning classifier provides the best detection performance for real-time anomaly detection in IoT network?”</a:t>
-            </a:r>
-          </a:p>
-          <a:p>
-            <a:pPr marL="0" indent="0" algn="ctr">
-              <a:buNone/>
-            </a:pPr>
-            <a:endParaRPr lang="en-US" dirty="0"/>
+              <a:t>“How can machine learning be used to detect anomalies in IoT network data and evaluate the performance of different models efficiently through a user-friendly system?”</a:t>
+            </a:r>
           </a:p>
         </p:txBody>
       </p:sp>
@@ -11159,45 +11019,57 @@
           <a:lstStyle/>
           <a:p>
             <a:r>
-              <a:rPr lang="en-US" dirty="0">
+              <a:rPr lang="en-IN" dirty="0">
                 <a:latin typeface="Times New Roman" panose="02020603050405020304" pitchFamily="18" charset="0"/>
                 <a:cs typeface="Times New Roman" panose="02020603050405020304" pitchFamily="18" charset="0"/>
               </a:rPr>
-              <a:t>To preprocess and analyze RT_IoT2022 dataset</a:t>
-            </a:r>
-          </a:p>
-          <a:p>
-            <a:r>
-              <a:rPr lang="en-US" dirty="0">
+              <a:t>Pre-process IoT datasets.</a:t>
+            </a:r>
+          </a:p>
+          <a:p>
+            <a:r>
+              <a:rPr lang="en-IN" dirty="0">
                 <a:latin typeface="Times New Roman" panose="02020603050405020304" pitchFamily="18" charset="0"/>
                 <a:cs typeface="Times New Roman" panose="02020603050405020304" pitchFamily="18" charset="0"/>
               </a:rPr>
-              <a:t>To implement multiple ML algorithms</a:t>
-            </a:r>
-          </a:p>
-          <a:p>
-            <a:r>
-              <a:rPr lang="en-US" dirty="0">
+              <a:t>Implement multiple ML models.</a:t>
+            </a:r>
+          </a:p>
+          <a:p>
+            <a:r>
+              <a:rPr lang="en-IN" dirty="0">
                 <a:latin typeface="Times New Roman" panose="02020603050405020304" pitchFamily="18" charset="0"/>
                 <a:cs typeface="Times New Roman" panose="02020603050405020304" pitchFamily="18" charset="0"/>
               </a:rPr>
-              <a:t>To compare performance using accuracy, precision, recall, and F1-score</a:t>
-            </a:r>
-          </a:p>
-          <a:p>
-            <a:r>
-              <a:rPr lang="en-US" dirty="0">
+              <a:t>Develop a web-based system</a:t>
+            </a:r>
+          </a:p>
+          <a:p>
+            <a:r>
+              <a:rPr lang="en-IN" dirty="0">
                 <a:latin typeface="Times New Roman" panose="02020603050405020304" pitchFamily="18" charset="0"/>
                 <a:cs typeface="Times New Roman" panose="02020603050405020304" pitchFamily="18" charset="0"/>
               </a:rPr>
-              <a:t>To identify the best-performing anomaly detection model</a:t>
-            </a:r>
-          </a:p>
-          <a:p>
-            <a:pPr marL="0" indent="0">
-              <a:buNone/>
-            </a:pPr>
-            <a:endParaRPr lang="en-IN" dirty="0"/>
+              <a:t>Allow dataset upload and model selection</a:t>
+            </a:r>
+          </a:p>
+          <a:p>
+            <a:r>
+              <a:rPr lang="en-IN" dirty="0">
+                <a:latin typeface="Times New Roman" panose="02020603050405020304" pitchFamily="18" charset="0"/>
+                <a:cs typeface="Times New Roman" panose="02020603050405020304" pitchFamily="18" charset="0"/>
+              </a:rPr>
+              <a:t>Analyse model performance</a:t>
+            </a:r>
+          </a:p>
+          <a:p>
+            <a:r>
+              <a:rPr lang="en-IN" dirty="0">
+                <a:latin typeface="Times New Roman" panose="02020603050405020304" pitchFamily="18" charset="0"/>
+                <a:cs typeface="Times New Roman" panose="02020603050405020304" pitchFamily="18" charset="0"/>
+              </a:rPr>
+              <a:t>Identify misclassified instances</a:t>
+            </a:r>
           </a:p>
         </p:txBody>
       </p:sp>
@@ -11279,7 +11151,7 @@
             <p:ph idx="1"/>
             <p:extLst>
               <p:ext uri="{D42A27DB-BD31-4B8C-83A1-F6EECF244321}">
-                <p14:modId xmlns:p14="http://schemas.microsoft.com/office/powerpoint/2010/main" val="2243880355"/>
+                <p14:modId xmlns:p14="http://schemas.microsoft.com/office/powerpoint/2010/main" val="91514380"/>
               </p:ext>
             </p:extLst>
           </p:nvPr>
